--- a/GPP_ZombieAI_LastNameFirstName_2DAEXX.pptx
+++ b/GPP_ZombieAI_LastNameFirstName_2DAEXX.pptx
@@ -405,7 +405,7 @@
           <a:p>
             <a:fld id="{82085877-2B37-48E7-8B6D-4D4ED486130A}" type="datetimeFigureOut">
               <a:rPr lang="en-BE" smtClean="0"/>
-              <a:t>11/28/2023</a:t>
+              <a:t>05/18/2026</a:t>
             </a:fld>
             <a:endParaRPr lang="en-BE"/>
           </a:p>
@@ -459,7 +459,7 @@
           <a:p>
             <a:fld id="{F15161DE-E191-4798-91BE-355EA90292A5}" type="slidenum">
               <a:rPr lang="en-BE" smtClean="0"/>
-              <a:t>‹#›</a:t>
+              <a:t>‹nº›</a:t>
             </a:fld>
             <a:endParaRPr lang="en-BE"/>
           </a:p>
@@ -605,7 +605,7 @@
           <a:p>
             <a:fld id="{82085877-2B37-48E7-8B6D-4D4ED486130A}" type="datetimeFigureOut">
               <a:rPr lang="en-BE" smtClean="0"/>
-              <a:t>11/28/2023</a:t>
+              <a:t>05/18/2026</a:t>
             </a:fld>
             <a:endParaRPr lang="en-BE"/>
           </a:p>
@@ -659,7 +659,7 @@
           <a:p>
             <a:fld id="{F15161DE-E191-4798-91BE-355EA90292A5}" type="slidenum">
               <a:rPr lang="en-BE" smtClean="0"/>
-              <a:t>‹#›</a:t>
+              <a:t>‹nº›</a:t>
             </a:fld>
             <a:endParaRPr lang="en-BE"/>
           </a:p>
@@ -815,7 +815,7 @@
           <a:p>
             <a:fld id="{82085877-2B37-48E7-8B6D-4D4ED486130A}" type="datetimeFigureOut">
               <a:rPr lang="en-BE" smtClean="0"/>
-              <a:t>11/28/2023</a:t>
+              <a:t>05/18/2026</a:t>
             </a:fld>
             <a:endParaRPr lang="en-BE"/>
           </a:p>
@@ -869,7 +869,7 @@
           <a:p>
             <a:fld id="{F15161DE-E191-4798-91BE-355EA90292A5}" type="slidenum">
               <a:rPr lang="en-BE" smtClean="0"/>
-              <a:t>‹#›</a:t>
+              <a:t>‹nº›</a:t>
             </a:fld>
             <a:endParaRPr lang="en-BE"/>
           </a:p>
@@ -1015,7 +1015,7 @@
           <a:p>
             <a:fld id="{82085877-2B37-48E7-8B6D-4D4ED486130A}" type="datetimeFigureOut">
               <a:rPr lang="en-BE" smtClean="0"/>
-              <a:t>11/28/2023</a:t>
+              <a:t>05/18/2026</a:t>
             </a:fld>
             <a:endParaRPr lang="en-BE"/>
           </a:p>
@@ -1069,7 +1069,7 @@
           <a:p>
             <a:fld id="{F15161DE-E191-4798-91BE-355EA90292A5}" type="slidenum">
               <a:rPr lang="en-BE" smtClean="0"/>
-              <a:t>‹#›</a:t>
+              <a:t>‹nº›</a:t>
             </a:fld>
             <a:endParaRPr lang="en-BE"/>
           </a:p>
@@ -1291,7 +1291,7 @@
           <a:p>
             <a:fld id="{82085877-2B37-48E7-8B6D-4D4ED486130A}" type="datetimeFigureOut">
               <a:rPr lang="en-BE" smtClean="0"/>
-              <a:t>11/28/2023</a:t>
+              <a:t>05/18/2026</a:t>
             </a:fld>
             <a:endParaRPr lang="en-BE"/>
           </a:p>
@@ -1345,7 +1345,7 @@
           <a:p>
             <a:fld id="{F15161DE-E191-4798-91BE-355EA90292A5}" type="slidenum">
               <a:rPr lang="en-BE" smtClean="0"/>
-              <a:t>‹#›</a:t>
+              <a:t>‹nº›</a:t>
             </a:fld>
             <a:endParaRPr lang="en-BE"/>
           </a:p>
@@ -1559,7 +1559,7 @@
           <a:p>
             <a:fld id="{82085877-2B37-48E7-8B6D-4D4ED486130A}" type="datetimeFigureOut">
               <a:rPr lang="en-BE" smtClean="0"/>
-              <a:t>11/28/2023</a:t>
+              <a:t>05/18/2026</a:t>
             </a:fld>
             <a:endParaRPr lang="en-BE"/>
           </a:p>
@@ -1613,7 +1613,7 @@
           <a:p>
             <a:fld id="{F15161DE-E191-4798-91BE-355EA90292A5}" type="slidenum">
               <a:rPr lang="en-BE" smtClean="0"/>
-              <a:t>‹#›</a:t>
+              <a:t>‹nº›</a:t>
             </a:fld>
             <a:endParaRPr lang="en-BE"/>
           </a:p>
@@ -1974,7 +1974,7 @@
           <a:p>
             <a:fld id="{82085877-2B37-48E7-8B6D-4D4ED486130A}" type="datetimeFigureOut">
               <a:rPr lang="en-BE" smtClean="0"/>
-              <a:t>11/28/2023</a:t>
+              <a:t>05/18/2026</a:t>
             </a:fld>
             <a:endParaRPr lang="en-BE"/>
           </a:p>
@@ -2028,7 +2028,7 @@
           <a:p>
             <a:fld id="{F15161DE-E191-4798-91BE-355EA90292A5}" type="slidenum">
               <a:rPr lang="en-BE" smtClean="0"/>
-              <a:t>‹#›</a:t>
+              <a:t>‹nº›</a:t>
             </a:fld>
             <a:endParaRPr lang="en-BE"/>
           </a:p>
@@ -2116,7 +2116,7 @@
           <a:p>
             <a:fld id="{82085877-2B37-48E7-8B6D-4D4ED486130A}" type="datetimeFigureOut">
               <a:rPr lang="en-BE" smtClean="0"/>
-              <a:t>11/28/2023</a:t>
+              <a:t>05/18/2026</a:t>
             </a:fld>
             <a:endParaRPr lang="en-BE"/>
           </a:p>
@@ -2170,7 +2170,7 @@
           <a:p>
             <a:fld id="{F15161DE-E191-4798-91BE-355EA90292A5}" type="slidenum">
               <a:rPr lang="en-BE" smtClean="0"/>
-              <a:t>‹#›</a:t>
+              <a:t>‹nº›</a:t>
             </a:fld>
             <a:endParaRPr lang="en-BE"/>
           </a:p>
@@ -2229,7 +2229,7 @@
           <a:p>
             <a:fld id="{82085877-2B37-48E7-8B6D-4D4ED486130A}" type="datetimeFigureOut">
               <a:rPr lang="en-BE" smtClean="0"/>
-              <a:t>11/28/2023</a:t>
+              <a:t>05/18/2026</a:t>
             </a:fld>
             <a:endParaRPr lang="en-BE"/>
           </a:p>
@@ -2283,7 +2283,7 @@
           <a:p>
             <a:fld id="{F15161DE-E191-4798-91BE-355EA90292A5}" type="slidenum">
               <a:rPr lang="en-BE" smtClean="0"/>
-              <a:t>‹#›</a:t>
+              <a:t>‹nº›</a:t>
             </a:fld>
             <a:endParaRPr lang="en-BE"/>
           </a:p>
@@ -2542,7 +2542,7 @@
           <a:p>
             <a:fld id="{82085877-2B37-48E7-8B6D-4D4ED486130A}" type="datetimeFigureOut">
               <a:rPr lang="en-BE" smtClean="0"/>
-              <a:t>11/28/2023</a:t>
+              <a:t>05/18/2026</a:t>
             </a:fld>
             <a:endParaRPr lang="en-BE"/>
           </a:p>
@@ -2596,7 +2596,7 @@
           <a:p>
             <a:fld id="{F15161DE-E191-4798-91BE-355EA90292A5}" type="slidenum">
               <a:rPr lang="en-BE" smtClean="0"/>
-              <a:t>‹#›</a:t>
+              <a:t>‹nº›</a:t>
             </a:fld>
             <a:endParaRPr lang="en-BE"/>
           </a:p>
@@ -2831,7 +2831,7 @@
           <a:p>
             <a:fld id="{82085877-2B37-48E7-8B6D-4D4ED486130A}" type="datetimeFigureOut">
               <a:rPr lang="en-BE" smtClean="0"/>
-              <a:t>11/28/2023</a:t>
+              <a:t>05/18/2026</a:t>
             </a:fld>
             <a:endParaRPr lang="en-BE"/>
           </a:p>
@@ -2885,7 +2885,7 @@
           <a:p>
             <a:fld id="{F15161DE-E191-4798-91BE-355EA90292A5}" type="slidenum">
               <a:rPr lang="en-BE" smtClean="0"/>
-              <a:t>‹#›</a:t>
+              <a:t>‹nº›</a:t>
             </a:fld>
             <a:endParaRPr lang="en-BE"/>
           </a:p>
@@ -3074,7 +3074,7 @@
           <a:p>
             <a:fld id="{82085877-2B37-48E7-8B6D-4D4ED486130A}" type="datetimeFigureOut">
               <a:rPr lang="en-BE" smtClean="0"/>
-              <a:t>11/28/2023</a:t>
+              <a:t>05/18/2026</a:t>
             </a:fld>
             <a:endParaRPr lang="en-BE"/>
           </a:p>
@@ -3164,7 +3164,7 @@
           <a:p>
             <a:fld id="{F15161DE-E191-4798-91BE-355EA90292A5}" type="slidenum">
               <a:rPr lang="en-BE" smtClean="0"/>
-              <a:t>‹#›</a:t>
+              <a:t>‹nº›</a:t>
             </a:fld>
             <a:endParaRPr lang="en-BE"/>
           </a:p>
@@ -3676,6 +3676,29 @@
               </a:rPr>
               <a:t>Tip: use miro.com!</a:t>
             </a:r>
+          </a:p>
+          <a:p>
+            <a:pPr lvl="1"/>
+            <a:r>
+              <a:rPr lang="en-US" i="1" dirty="0">
+                <a:solidFill>
+                  <a:schemeClr val="bg1">
+                    <a:lumMod val="75000"/>
+                  </a:schemeClr>
+                </a:solidFill>
+              </a:rPr>
+              <a:t>Make it pretty the </a:t>
+            </a:r>
+            <a:r>
+              <a:rPr lang="en-US" i="1" dirty="0" err="1">
+                <a:solidFill>
+                  <a:schemeClr val="bg1">
+                    <a:lumMod val="75000"/>
+                  </a:schemeClr>
+                </a:solidFill>
+              </a:rPr>
+              <a:t>bt</a:t>
+            </a:r>
             <a:endParaRPr lang="en-BE" i="1" dirty="0">
               <a:solidFill>
                 <a:schemeClr val="bg1">
@@ -3767,7 +3790,7 @@
           <a:lstStyle/>
           <a:p>
             <a:r>
-              <a:rPr lang="en-US" i="1">
+              <a:rPr lang="en-US" i="1" dirty="0">
                 <a:solidFill>
                   <a:schemeClr val="bg1">
                     <a:lumMod val="75000"/>
@@ -3776,7 +3799,7 @@
               </a:rPr>
               <a:t>How does your agent deal with enemies (aiming, shooting, item usage, avoidance, hiding, usage of sprint, …)?</a:t>
             </a:r>
-            <a:endParaRPr lang="en-BE" i="1">
+            <a:endParaRPr lang="en-BE" i="1" dirty="0">
               <a:solidFill>
                 <a:schemeClr val="bg1">
                   <a:lumMod val="75000"/>
@@ -3786,7 +3809,7 @@
           </a:p>
           <a:p>
             <a:r>
-              <a:rPr lang="en-US" i="1">
+              <a:rPr lang="en-US" i="1" dirty="0">
                 <a:solidFill>
                   <a:schemeClr val="bg1">
                     <a:lumMod val="75000"/>
@@ -3795,7 +3818,7 @@
               </a:rPr>
               <a:t>USE IMAGES/GIFS</a:t>
             </a:r>
-            <a:endParaRPr lang="en-BE"/>
+            <a:endParaRPr lang="en-BE" dirty="0"/>
           </a:p>
         </p:txBody>
       </p:sp>
@@ -3887,18 +3910,8 @@
                   </a:schemeClr>
                 </a:solidFill>
               </a:rPr>
-              <a:t>How does your agent manage the inventory (inventory organization, item usage, picking up and remembering items,…)? </a:t>
-            </a:r>
-            <a:endParaRPr lang="en-BE" i="1" dirty="0">
-              <a:solidFill>
-                <a:schemeClr val="bg1">
-                  <a:lumMod val="75000"/>
-                </a:schemeClr>
-              </a:solidFill>
-            </a:endParaRPr>
-          </a:p>
-          <a:p>
-            <a:endParaRPr lang="en-BE" dirty="0"/>
+              <a:t>How does your agent manage the inventory (inventory organization, item usage, picking up and remembering items,…)?</a:t>
+            </a:r>
           </a:p>
         </p:txBody>
       </p:sp>
@@ -3992,6 +4005,27 @@
               </a:rPr>
               <a:t>How many steering behaviors does it use? Does it use blended steering?</a:t>
             </a:r>
+          </a:p>
+          <a:p>
+            <a:endParaRPr lang="en-US" i="1" dirty="0">
+              <a:solidFill>
+                <a:schemeClr val="bg1">
+                  <a:lumMod val="75000"/>
+                </a:schemeClr>
+              </a:solidFill>
+            </a:endParaRPr>
+          </a:p>
+          <a:p>
+            <a:r>
+              <a:rPr lang="en-US" i="1" dirty="0">
+                <a:solidFill>
+                  <a:schemeClr val="bg1">
+                    <a:lumMod val="75000"/>
+                  </a:schemeClr>
+                </a:solidFill>
+              </a:rPr>
+              <a:t>Use blended steering even if it works better without</a:t>
+            </a:r>
             <a:endParaRPr lang="en-BE" i="1" dirty="0">
               <a:solidFill>
                 <a:schemeClr val="bg1">
@@ -4207,7 +4241,7 @@
               <a:buNone/>
             </a:pPr>
             <a:r>
-              <a:rPr lang="en-US">
+              <a:rPr lang="en-US" dirty="0">
                 <a:solidFill>
                   <a:schemeClr val="bg1">
                     <a:lumMod val="75000"/>
@@ -4216,7 +4250,54 @@
               </a:rPr>
               <a:t>Screen shot or list of highest scores</a:t>
             </a:r>
-            <a:endParaRPr lang="en-BE">
+          </a:p>
+          <a:p>
+            <a:pPr marL="0" indent="0">
+              <a:buNone/>
+            </a:pPr>
+            <a:endParaRPr lang="en-US" dirty="0">
+              <a:solidFill>
+                <a:schemeClr val="bg1">
+                  <a:lumMod val="75000"/>
+                </a:schemeClr>
+              </a:solidFill>
+            </a:endParaRPr>
+          </a:p>
+          <a:p>
+            <a:pPr marL="0" indent="0">
+              <a:buNone/>
+            </a:pPr>
+            <a:r>
+              <a:rPr lang="en-US" dirty="0">
+                <a:solidFill>
+                  <a:schemeClr val="bg1">
+                    <a:lumMod val="75000"/>
+                  </a:schemeClr>
+                </a:solidFill>
+              </a:rPr>
+              <a:t>Ignore this title add whatever I want here! </a:t>
+            </a:r>
+            <a:r>
+              <a:rPr lang="en-US" dirty="0" err="1">
+                <a:solidFill>
+                  <a:schemeClr val="bg1">
+                    <a:lumMod val="75000"/>
+                  </a:schemeClr>
+                </a:solidFill>
+              </a:rPr>
+              <a:t>Img</a:t>
+            </a:r>
+            <a:r>
+              <a:rPr lang="en-US" dirty="0">
+                <a:solidFill>
+                  <a:schemeClr val="bg1">
+                    <a:lumMod val="75000"/>
+                  </a:schemeClr>
+                </a:solidFill>
+              </a:rPr>
+              <a:t> or thank you or name</a:t>
+            </a:r>
+            <a:endParaRPr lang="en-BE" dirty="0">
               <a:solidFill>
                 <a:schemeClr val="bg1">
                   <a:lumMod val="75000"/>
@@ -4544,6 +4625,21 @@
 </file>
 
 <file path=customXml/item2.xml><?xml version="1.0" encoding="utf-8"?>
+<p:properties xmlns:p="http://schemas.microsoft.com/office/2006/metadata/properties" xmlns:xsi="http://www.w3.org/2001/XMLSchema-instance" xmlns:pc="http://schemas.microsoft.com/office/infopath/2007/PartnerControls">
+  <documentManagement>
+    <IconOverlay xmlns="http://schemas.microsoft.com/sharepoint/v4" xsi:nil="true"/>
+    <TaxCatchAll xmlns="128482ec-0431-40d5-ab26-89ea2a4f3ccd" xsi:nil="true"/>
+    <m99485b88215436a82099f8287cba0b0 xmlns="128482ec-0431-40d5-ab26-89ea2a4f3ccd">
+      <Terms xmlns="http://schemas.microsoft.com/office/infopath/2007/PartnerControls"/>
+    </m99485b88215436a82099f8287cba0b0>
+    <lcf76f155ced4ddcb4097134ff3c332f xmlns="60eb0cf4-ae2a-4762-800a-cb593b869ecb">
+      <Terms xmlns="http://schemas.microsoft.com/office/infopath/2007/PartnerControls"/>
+    </lcf76f155ced4ddcb4097134ff3c332f>
+  </documentManagement>
+</p:properties>
+</file>
+
+<file path=customXml/item3.xml><?xml version="1.0" encoding="utf-8"?>
 <ct:contentTypeSchema xmlns:ct="http://schemas.microsoft.com/office/2006/metadata/contentType" xmlns:ma="http://schemas.microsoft.com/office/2006/metadata/properties/metaAttributes" ct:_="" ma:_="" ma:contentTypeName="Document" ma:contentTypeID="0x010100723942CCEB3A674D8F1F6472CCEFB38E" ma:contentTypeVersion="11" ma:contentTypeDescription="Create a new document." ma:contentTypeScope="" ma:versionID="e4de40d148e029d40e3aaddc8bf68a5e">
   <xsd:schema xmlns:xsd="http://www.w3.org/2001/XMLSchema" xmlns:xs="http://www.w3.org/2001/XMLSchema" xmlns:p="http://schemas.microsoft.com/office/2006/metadata/properties" xmlns:ns2="128482ec-0431-40d5-ab26-89ea2a4f3ccd" xmlns:ns3="60eb0cf4-ae2a-4762-800a-cb593b869ecb" xmlns:ns4="http://schemas.microsoft.com/sharepoint/v4" xmlns:ns5="a2e691a9-fcfc-4d85-a390-1894fe98bd9e" targetNamespace="http://schemas.microsoft.com/office/2006/metadata/properties" ma:root="true" ma:fieldsID="fce8e8bd091658f3fe51b22d57dec109" ns2:_="" ns3:_="" ns4:_="" ns5:_="">
     <xsd:import namespace="128482ec-0431-40d5-ab26-89ea2a4f3ccd"/>
@@ -4816,21 +4912,6 @@
 </ct:contentTypeSchema>
 </file>
 
-<file path=customXml/item3.xml><?xml version="1.0" encoding="utf-8"?>
-<p:properties xmlns:p="http://schemas.microsoft.com/office/2006/metadata/properties" xmlns:xsi="http://www.w3.org/2001/XMLSchema-instance" xmlns:pc="http://schemas.microsoft.com/office/infopath/2007/PartnerControls">
-  <documentManagement>
-    <IconOverlay xmlns="http://schemas.microsoft.com/sharepoint/v4" xsi:nil="true"/>
-    <TaxCatchAll xmlns="128482ec-0431-40d5-ab26-89ea2a4f3ccd" xsi:nil="true"/>
-    <m99485b88215436a82099f8287cba0b0 xmlns="128482ec-0431-40d5-ab26-89ea2a4f3ccd">
-      <Terms xmlns="http://schemas.microsoft.com/office/infopath/2007/PartnerControls"/>
-    </m99485b88215436a82099f8287cba0b0>
-    <lcf76f155ced4ddcb4097134ff3c332f xmlns="60eb0cf4-ae2a-4762-800a-cb593b869ecb">
-      <Terms xmlns="http://schemas.microsoft.com/office/infopath/2007/PartnerControls"/>
-    </lcf76f155ced4ddcb4097134ff3c332f>
-  </documentManagement>
-</p:properties>
-</file>
-
 <file path=customXml/itemProps1.xml><?xml version="1.0" encoding="utf-8"?>
 <ds:datastoreItem xmlns:ds="http://schemas.openxmlformats.org/officeDocument/2006/customXml" ds:itemID="{AF8EC6D1-CB19-4400-AD0A-0C75CD884AEA}">
   <ds:schemaRefs>
@@ -4840,6 +4921,18 @@
 </file>
 
 <file path=customXml/itemProps2.xml><?xml version="1.0" encoding="utf-8"?>
+<ds:datastoreItem xmlns:ds="http://schemas.openxmlformats.org/officeDocument/2006/customXml" ds:itemID="{B743389A-7EE0-4951-8919-E91DD69E3687}">
+  <ds:schemaRefs>
+    <ds:schemaRef ds:uri="128482ec-0431-40d5-ab26-89ea2a4f3ccd"/>
+    <ds:schemaRef ds:uri="http://schemas.microsoft.com/office/2006/metadata/properties"/>
+    <ds:schemaRef ds:uri="http://schemas.microsoft.com/office/infopath/2007/PartnerControls"/>
+    <ds:schemaRef ds:uri="http://schemas.microsoft.com/sharepoint/v4"/>
+    <ds:schemaRef ds:uri="60eb0cf4-ae2a-4762-800a-cb593b869ecb"/>
+  </ds:schemaRefs>
+</ds:datastoreItem>
+</file>
+
+<file path=customXml/itemProps3.xml><?xml version="1.0" encoding="utf-8"?>
 <ds:datastoreItem xmlns:ds="http://schemas.openxmlformats.org/officeDocument/2006/customXml" ds:itemID="{D7B8C5DE-3345-4025-A942-C5AA68E55545}">
   <ds:schemaRefs>
     <ds:schemaRef ds:uri="http://schemas.microsoft.com/office/2006/metadata/contentType"/>
@@ -4858,16 +4951,4 @@
     <ds:schemaRef ds:uri="http://schemas.microsoft.com/internal/obd"/>
   </ds:schemaRefs>
 </ds:datastoreItem>
-</file>
-
-<file path=customXml/itemProps3.xml><?xml version="1.0" encoding="utf-8"?>
-<ds:datastoreItem xmlns:ds="http://schemas.openxmlformats.org/officeDocument/2006/customXml" ds:itemID="{B743389A-7EE0-4951-8919-E91DD69E3687}">
-  <ds:schemaRefs>
-    <ds:schemaRef ds:uri="128482ec-0431-40d5-ab26-89ea2a4f3ccd"/>
-    <ds:schemaRef ds:uri="http://schemas.microsoft.com/office/2006/metadata/properties"/>
-    <ds:schemaRef ds:uri="http://schemas.microsoft.com/office/infopath/2007/PartnerControls"/>
-    <ds:schemaRef ds:uri="http://schemas.microsoft.com/sharepoint/v4"/>
-    <ds:schemaRef ds:uri="60eb0cf4-ae2a-4762-800a-cb593b869ecb"/>
-  </ds:schemaRefs>
-</ds:datastoreItem>
 </file>